--- a/生成的课件/第5章  成本利润分析.pptx
+++ b/生成的课件/第5章  成本利润分析.pptx
@@ -4353,7 +4353,7 @@
                 <a:latin typeface="Times New Roman"/>
                 <a:ea typeface="宋体"/>
               </a:rPr>
-              <a:t>  1. 范围经济（Economies of Scope）数理定义与判定</a:t>
+              <a:t>1. 范围经济（Economies of Scope）数理定义与判定</a:t>
             </a:r>
           </a:p>
         </p:txBody>
@@ -4396,7 +4396,7 @@
                 <a:latin typeface="Times New Roman"/>
                 <a:ea typeface="宋体"/>
               </a:rPr>
-              <a:t>（1）概念界定： </a:t>
+              <a:t>（1）概念界定：</a:t>
             </a:r>
             <a:r>
               <a:rPr sz="1250" b="0">
@@ -4426,7 +4426,7 @@
                 <a:latin typeface="Times New Roman"/>
                 <a:ea typeface="宋体"/>
               </a:rPr>
-              <a:t>（2）数学判定公式： </a:t>
+              <a:t>（2）数学判定公式：</a:t>
             </a:r>
             <a:r>
               <a:rPr sz="1250" b="0">
@@ -4436,7 +4436,7 @@
                 <a:latin typeface="Times New Roman"/>
                 <a:ea typeface="宋体"/>
               </a:rPr>
-              <a:t>C(Q_1, Q_2) &lt; C(Q_1, 0) + C(0, Q_2) \implies SC = \frac{C(Q_1,0) + C(0,Q_2) - C(Q_1,Q_2)}{C(Q_1,Q_2)} &gt; 0</a:t>
+              <a:t>C(Q₁, Q₂) &lt; C(Q₁, 0) + C(0, Q₂) ⇒ SC = (C(Q₁,0) + C(0,Q₂) - C(Q₁,Q₂)) / (C(Q₁,Q₂)) &gt; 0</a:t>
             </a:r>
           </a:p>
           <a:p>
@@ -4456,7 +4456,7 @@
                 <a:latin typeface="Times New Roman"/>
                 <a:ea typeface="宋体"/>
               </a:rPr>
-              <a:t>（3）三大核心成因： </a:t>
+              <a:t>（3）三大核心成因：</a:t>
             </a:r>
             <a:r>
               <a:rPr sz="1250" b="0">
@@ -4566,7 +4566,7 @@
                 <a:latin typeface="Times New Roman"/>
                 <a:ea typeface="宋体"/>
               </a:rPr>
-              <a:t>  2. 案例5-1：丰田准时制（JIT）与精益柔性生产</a:t>
+              <a:t>2. 案例5-1：丰田准时制（JIT）与精益柔性生产</a:t>
             </a:r>
           </a:p>
         </p:txBody>
@@ -4609,7 +4609,7 @@
                 <a:latin typeface="Times New Roman"/>
                 <a:ea typeface="宋体"/>
               </a:rPr>
-              <a:t>（1）传统福特制规模经济局限： </a:t>
+              <a:t>（1）传统福特制规模经济局限：</a:t>
             </a:r>
             <a:r>
               <a:rPr sz="1250" b="0">
@@ -4639,7 +4639,7 @@
                 <a:latin typeface="Times New Roman"/>
                 <a:ea typeface="宋体"/>
               </a:rPr>
-              <a:t>（2）丰田精益创新： </a:t>
+              <a:t>（2）丰田精益创新：</a:t>
             </a:r>
             <a:r>
               <a:rPr sz="1250" b="0">
@@ -4669,7 +4669,7 @@
                 <a:latin typeface="Times New Roman"/>
                 <a:ea typeface="宋体"/>
               </a:rPr>
-              <a:t>（3）管理启示： </a:t>
+              <a:t>（3）管理启示：</a:t>
             </a:r>
             <a:r>
               <a:rPr sz="1250" b="0">
@@ -4736,7 +4736,7 @@
                 <a:latin typeface="Times New Roman"/>
                 <a:ea typeface="宋体"/>
               </a:rPr>
-              <a:t>  ★ 核心要点：范围经济为现代大型企业的多元化战略、平台化生态与共线柔性制造提供了强大的成本协同逻辑。</a:t>
+              <a:t>★ 核心要点：范围经济为现代大型企业的多元化战略、平台化生态与共线柔性制造提供了强大的成本协同逻辑。</a:t>
             </a:r>
           </a:p>
         </p:txBody>
@@ -5450,7 +5450,7 @@
                 <a:latin typeface="Times New Roman"/>
                 <a:ea typeface="宋体"/>
               </a:rPr>
-              <a:t>  1. 边际贡献（Contribution Margin）原理</a:t>
+              <a:t>1. 边际贡献（Contribution Margin）原理</a:t>
             </a:r>
           </a:p>
         </p:txBody>
@@ -5493,7 +5493,7 @@
                 <a:latin typeface="Times New Roman"/>
                 <a:ea typeface="宋体"/>
               </a:rPr>
-              <a:t>（1）单位边际贡献： </a:t>
+              <a:t>（1）单位边际贡献：</a:t>
             </a:r>
             <a:r>
               <a:rPr sz="1250" b="0">
@@ -5503,7 +5503,7 @@
                 <a:latin typeface="Times New Roman"/>
                 <a:ea typeface="宋体"/>
               </a:rPr>
-              <a:t>cm = P - V \quad (P 为单价, V 为单位变动成本)</a:t>
+              <a:t>cm = P - V (P 为单价, V 为单位变动成本)</a:t>
             </a:r>
           </a:p>
           <a:p>
@@ -5523,7 +5523,7 @@
                 <a:latin typeface="Times New Roman"/>
                 <a:ea typeface="宋体"/>
               </a:rPr>
-              <a:t>（2）总边际贡献： </a:t>
+              <a:t>（2）总边际贡献：</a:t>
             </a:r>
             <a:r>
               <a:rPr sz="1250" b="0">
@@ -5533,7 +5533,7 @@
                 <a:latin typeface="Times New Roman"/>
                 <a:ea typeface="宋体"/>
               </a:rPr>
-              <a:t>TCM = TR - TVC = (P - V) \cdot Q</a:t>
+              <a:t>TCM = TR - TVC = (P - V) · Q</a:t>
             </a:r>
           </a:p>
           <a:p>
@@ -5553,7 +5553,7 @@
                 <a:latin typeface="Times New Roman"/>
                 <a:ea typeface="宋体"/>
               </a:rPr>
-              <a:t>（3）边际贡献率： </a:t>
+              <a:t>（3）边际贡献率：</a:t>
             </a:r>
             <a:r>
               <a:rPr sz="1250" b="0">
@@ -5563,7 +5563,7 @@
                 <a:latin typeface="Times New Roman"/>
                 <a:ea typeface="宋体"/>
               </a:rPr>
-              <a:t>CMR = \frac{P - V}{P} = \frac{TCM}{TR}</a:t>
+              <a:t>CMR = (P - V) / P = TCM / TR</a:t>
             </a:r>
           </a:p>
           <a:p>
@@ -5583,7 +5583,7 @@
                 <a:latin typeface="Times New Roman"/>
                 <a:ea typeface="宋体"/>
               </a:rPr>
-              <a:t>（4）利润生成公式： </a:t>
+              <a:t>（4）利润生成公式：</a:t>
             </a:r>
             <a:r>
               <a:rPr sz="1250" b="0">
@@ -5593,7 +5593,7 @@
                 <a:latin typeface="Times New Roman"/>
                 <a:ea typeface="宋体"/>
               </a:rPr>
-              <a:t>\pi = TCM - F \quad (边际贡献首先用于补偿全部固定成本 F，剩余部分即为企业纯利润！)</a:t>
+              <a:t>π = TCM - F (边际贡献首先用于补偿全部固定成本 F，剩余部分即为企业纯利润！)</a:t>
             </a:r>
           </a:p>
         </p:txBody>
@@ -5693,7 +5693,7 @@
                 <a:latin typeface="Times New Roman"/>
                 <a:ea typeface="宋体"/>
               </a:rPr>
-              <a:t>  2. 场景一：接受追加低价订单决策（例5-1）</a:t>
+              <a:t>2. 场景一：接受追加低价订单决策（例5-1）</a:t>
             </a:r>
           </a:p>
         </p:txBody>
@@ -5736,7 +5736,7 @@
                 <a:latin typeface="Times New Roman"/>
                 <a:ea typeface="宋体"/>
               </a:rPr>
-              <a:t>（1）决策准则： </a:t>
+              <a:t>（1）决策准则：</a:t>
             </a:r>
             <a:r>
               <a:rPr sz="1250" b="0">
@@ -5766,7 +5766,7 @@
                 <a:latin typeface="Times New Roman"/>
                 <a:ea typeface="宋体"/>
               </a:rPr>
-              <a:t>（2）例5-1 演算： </a:t>
+              <a:t>（2）例5-1 演算：</a:t>
             </a:r>
             <a:r>
               <a:rPr sz="1250" b="0">
@@ -5833,7 +5833,7 @@
                 <a:latin typeface="Times New Roman"/>
                 <a:ea typeface="宋体"/>
               </a:rPr>
-              <a:t>  ★ 核心要点：贡献分析法彻底颠覆了孤立看完全成本的局限，是企业在产能富余时抓取增量现金流的利器。</a:t>
+              <a:t>★ 核心要点：贡献分析法彻底颠覆了孤立看完全成本的局限，是企业在产能富余时抓取增量现金流的利器。</a:t>
             </a:r>
           </a:p>
         </p:txBody>
@@ -6240,7 +6240,7 @@
                 <a:latin typeface="Times New Roman"/>
                 <a:ea typeface="宋体"/>
               </a:rPr>
-              <a:t>  1. 场景二：亏损产品是否应当停产决策（例5-2）</a:t>
+              <a:t>1. 场景二：亏损产品是否应当停产决策（例5-2）</a:t>
             </a:r>
           </a:p>
         </p:txBody>
@@ -6283,7 +6283,7 @@
                 <a:latin typeface="Times New Roman"/>
                 <a:ea typeface="宋体"/>
               </a:rPr>
-              <a:t>（1）决策误区： </a:t>
+              <a:t>（1）决策误区：</a:t>
             </a:r>
             <a:r>
               <a:rPr sz="1250" b="0">
@@ -6313,7 +6313,7 @@
                 <a:latin typeface="Times New Roman"/>
                 <a:ea typeface="宋体"/>
               </a:rPr>
-              <a:t>（2）科学决策准则： </a:t>
+              <a:t>（2）科学决策准则：</a:t>
             </a:r>
             <a:r>
               <a:rPr sz="1250" b="0">
@@ -6343,7 +6343,7 @@
                 <a:latin typeface="Times New Roman"/>
                 <a:ea typeface="宋体"/>
               </a:rPr>
-              <a:t>（3）机理： </a:t>
+              <a:t>（3）机理：</a:t>
             </a:r>
             <a:r>
               <a:rPr sz="1250" b="0">
@@ -6453,7 +6453,7 @@
                 <a:latin typeface="Times New Roman"/>
                 <a:ea typeface="宋体"/>
               </a:rPr>
-              <a:t>  2. 场景三 &amp; 四：自制外购与瓶颈资源分配（例5-3/5-4）</a:t>
+              <a:t>2. 场景三 &amp; 四：自制外购与瓶颈资源分配（例5-3/5-4）</a:t>
             </a:r>
           </a:p>
         </p:txBody>
@@ -6496,7 +6496,7 @@
                 <a:latin typeface="Times New Roman"/>
                 <a:ea typeface="宋体"/>
               </a:rPr>
-              <a:t>（1）零部件自制 vs 外购： </a:t>
+              <a:t>（1）零部件自制 vs 外购：</a:t>
             </a:r>
             <a:r>
               <a:rPr sz="1250" b="0">
@@ -6526,7 +6526,7 @@
                 <a:latin typeface="Times New Roman"/>
                 <a:ea typeface="宋体"/>
               </a:rPr>
-              <a:t>（2）受约束瓶颈资源分配： </a:t>
+              <a:t>（2）受约束瓶颈资源分配：</a:t>
             </a:r>
             <a:r>
               <a:rPr sz="1250" b="0">
@@ -6593,7 +6593,7 @@
                 <a:latin typeface="Times New Roman"/>
                 <a:ea typeface="宋体"/>
               </a:rPr>
-              <a:t>  ★ 核心要点：贡献分析法以增量现金流为导向，有效避免了因会计费用机械分摊而导致的错误停产杀伤。</a:t>
+              <a:t>★ 核心要点：贡献分析法以增量现金流为导向，有效避免了因会计费用机械分摊而导致的错误停产杀伤。</a:t>
             </a:r>
           </a:p>
         </p:txBody>
@@ -7331,7 +7331,7 @@
                 <a:latin typeface="Times New Roman"/>
                 <a:ea typeface="宋体"/>
               </a:rPr>
-              <a:t>  盈亏平衡保本点与目标利润公式</a:t>
+              <a:t>盈亏平衡保本点与目标利润公式</a:t>
             </a:r>
           </a:p>
         </p:txBody>
@@ -7374,7 +7374,7 @@
                 <a:latin typeface="Times New Roman"/>
                 <a:ea typeface="宋体"/>
               </a:rPr>
-              <a:t>（1）保本产销量公式 (BEP)： </a:t>
+              <a:t>（1）保本产销量公式 (BEP)：</a:t>
             </a:r>
             <a:r>
               <a:rPr sz="1200" b="0">
@@ -7384,7 +7384,7 @@
                 <a:latin typeface="Times New Roman"/>
                 <a:ea typeface="宋体"/>
               </a:rPr>
-              <a:t>Q_0 = \frac{F}{P - V} = \frac{F}{cm} \quad (总收益 TR 恰好等于总成本 TC，利润为 0)</a:t>
+              <a:t>Q₀ = (F) / (P - V) = F / cm (总收益 TR 恰好等于总成本 TC，利润为 0)</a:t>
             </a:r>
           </a:p>
           <a:p>
@@ -7404,7 +7404,7 @@
                 <a:latin typeface="Times New Roman"/>
                 <a:ea typeface="宋体"/>
               </a:rPr>
-              <a:t>（2）保本销售额公式： </a:t>
+              <a:t>（2）保本销售额公式：</a:t>
             </a:r>
             <a:r>
               <a:rPr sz="1200" b="0">
@@ -7414,7 +7414,7 @@
                 <a:latin typeface="Times New Roman"/>
                 <a:ea typeface="宋体"/>
               </a:rPr>
-              <a:t>S_0 = P \cdot Q_0 = \frac{F}{CMR} = \frac{F}{(P - V)/P}</a:t>
+              <a:t>S₀ = P · Q₀ = F / CMR = (F) / ((P - V)/P)</a:t>
             </a:r>
           </a:p>
           <a:p>
@@ -7434,7 +7434,7 @@
                 <a:latin typeface="Times New Roman"/>
                 <a:ea typeface="宋体"/>
               </a:rPr>
-              <a:t>（3）目标利润产销量规划公式： </a:t>
+              <a:t>（3）目标利润产销量规划公式：</a:t>
             </a:r>
             <a:r>
               <a:rPr sz="1200" b="0">
@@ -7444,7 +7444,7 @@
                 <a:latin typeface="Times New Roman"/>
                 <a:ea typeface="宋体"/>
               </a:rPr>
-              <a:t>Q^* = \frac{F + \pi^*}{P - V} \quad (\pi^* 为企业预设税前目标利润)</a:t>
+              <a:t>Q* = (F + π*) / (P - V) (π* 为企业预设税前目标利润)</a:t>
             </a:r>
           </a:p>
           <a:p>
@@ -7464,7 +7464,7 @@
                 <a:latin typeface="Times New Roman"/>
                 <a:ea typeface="宋体"/>
               </a:rPr>
-              <a:t>（4）目标税后净利润规划： </a:t>
+              <a:t>（4）目标税后净利润规划：</a:t>
             </a:r>
             <a:r>
               <a:rPr sz="1200" b="0">
@@ -7474,7 +7474,7 @@
                 <a:latin typeface="Times New Roman"/>
                 <a:ea typeface="宋体"/>
               </a:rPr>
-              <a:t>Q^* = \frac{F + \pi_{net}^* / (1 - T)}{P - V} \quad (T: 企业所得税率)</a:t>
+              <a:t>Q* = (F + π_net* / (1 - T)) / (P - V) (T: 企业所得税率)</a:t>
             </a:r>
           </a:p>
         </p:txBody>
@@ -7531,7 +7531,7 @@
                 <a:latin typeface="Times New Roman"/>
                 <a:ea typeface="宋体"/>
               </a:rPr>
-              <a:t>  ★ 理论精要：盈亏平衡分析是企业测算投资安全底线、制定销售指标与预算规划最基础且不可或缺的模型。</a:t>
+              <a:t>★ 理论精要：盈亏平衡分析是企业测算投资安全底线、制定销售指标与预算规划最基础且不可或缺的模型。</a:t>
             </a:r>
           </a:p>
         </p:txBody>
@@ -7938,7 +7938,7 @@
                 <a:latin typeface="Times New Roman"/>
                 <a:ea typeface="宋体"/>
               </a:rPr>
-              <a:t>  1. 安全边际（Margin of Safety）量化指标体系</a:t>
+              <a:t>1. 安全边际（Margin of Safety）量化指标体系</a:t>
             </a:r>
           </a:p>
         </p:txBody>
@@ -7981,7 +7981,7 @@
                 <a:latin typeface="Times New Roman"/>
                 <a:ea typeface="宋体"/>
               </a:rPr>
-              <a:t>（1）安全边际量： </a:t>
+              <a:t>（1）安全边际量：</a:t>
             </a:r>
             <a:r>
               <a:rPr sz="1250" b="0">
@@ -7991,7 +7991,7 @@
                 <a:latin typeface="Times New Roman"/>
                 <a:ea typeface="宋体"/>
               </a:rPr>
-              <a:t>MS_Q = 正常（或预算）实际销售量 Q - 盈亏平衡保本销售量 Q_0</a:t>
+              <a:t>MS_Q = 正常（或预算）实际销售量 Q - 盈亏平衡保本销售量 Q₀</a:t>
             </a:r>
           </a:p>
           <a:p>
@@ -8011,7 +8011,7 @@
                 <a:latin typeface="Times New Roman"/>
                 <a:ea typeface="宋体"/>
               </a:rPr>
-              <a:t>（2）安全边际额： </a:t>
+              <a:t>（2）安全边际额：</a:t>
             </a:r>
             <a:r>
               <a:rPr sz="1250" b="0">
@@ -8021,7 +8021,7 @@
                 <a:latin typeface="Times New Roman"/>
                 <a:ea typeface="宋体"/>
               </a:rPr>
-              <a:t>MS_S = 正常（或预算）实际销售额 S - 盈亏平衡保本销售额 S_0</a:t>
+              <a:t>MS_S = 正常（或预算）实际销售额 S - 盈亏平衡保本销售额 S₀</a:t>
             </a:r>
           </a:p>
           <a:p>
@@ -8041,7 +8041,7 @@
                 <a:latin typeface="Times New Roman"/>
                 <a:ea typeface="宋体"/>
               </a:rPr>
-              <a:t>（3）安全边际率（MSR）： </a:t>
+              <a:t>（3）安全边际率（MSR）：</a:t>
             </a:r>
             <a:r>
               <a:rPr sz="1250" b="0">
@@ -8051,7 +8051,7 @@
                 <a:latin typeface="Times New Roman"/>
                 <a:ea typeface="宋体"/>
               </a:rPr>
-              <a:t>MSR = \frac{MS_Q}{Q} \times 100\% = \frac{Q - Q_0}{Q} \times 100\%</a:t>
+              <a:t>MSR = MS_Q / Q × 100% = (Q - Q₀) / Q × 100%</a:t>
             </a:r>
           </a:p>
         </p:txBody>
@@ -8151,7 +8151,7 @@
                 <a:latin typeface="Times New Roman"/>
                 <a:ea typeface="宋体"/>
               </a:rPr>
-              <a:t>  2. 经营安全性国际评价标准与利润转化</a:t>
+              <a:t>2. 经营安全性国际评价标准与利润转化</a:t>
             </a:r>
           </a:p>
         </p:txBody>
@@ -8194,7 +8194,7 @@
                 <a:latin typeface="Times New Roman"/>
                 <a:ea typeface="宋体"/>
               </a:rPr>
-              <a:t>（1）安全性量化分级： </a:t>
+              <a:t>（1）安全性量化分级：</a:t>
             </a:r>
             <a:r>
               <a:rPr sz="1250" b="0">
@@ -8224,7 +8224,7 @@
                 <a:latin typeface="Times New Roman"/>
                 <a:ea typeface="宋体"/>
               </a:rPr>
-              <a:t>   • MSR &gt; 40%：极安全（护城河深厚）； </a:t>
+              <a:t>• MSR &gt; 40%：极安全（护城河深厚）；</a:t>
             </a:r>
             <a:r>
               <a:rPr sz="1250" b="0">
@@ -8254,7 +8254,7 @@
                 <a:latin typeface="Times New Roman"/>
                 <a:ea typeface="宋体"/>
               </a:rPr>
-              <a:t>   • 20% ~ 30%：较安全； </a:t>
+              <a:t>• 20% ~ 30%：较安全；</a:t>
             </a:r>
             <a:r>
               <a:rPr sz="1250" b="0">
@@ -8284,7 +8284,7 @@
                 <a:latin typeface="Times New Roman"/>
                 <a:ea typeface="宋体"/>
               </a:rPr>
-              <a:t>（2）销售利润率与安全边际率的奇妙联立： </a:t>
+              <a:t>（2）销售利润率与安全边际率的奇妙联立：</a:t>
             </a:r>
             <a:r>
               <a:rPr sz="1250" b="0">
@@ -8294,7 +8294,7 @@
                 <a:latin typeface="Times New Roman"/>
                 <a:ea typeface="宋体"/>
               </a:rPr>
-              <a:t>\text{销售利润率} = \frac{\pi}{TR} = \text{安全边际率 (MSR)} \times \text{边际贡献率 (CMR)}</a:t>
+              <a:t>销售利润率 = (π) / TR = 安全边际率 (MSR) × 边际贡献率 (CMR)</a:t>
             </a:r>
           </a:p>
         </p:txBody>
@@ -8351,7 +8351,7 @@
                 <a:latin typeface="Times New Roman"/>
                 <a:ea typeface="宋体"/>
               </a:rPr>
-              <a:t>  ★ 核心要点：安全边际率度量了企业在不发生亏损的前提下所能承受的最大销售下滑幅度，是企业抗风险能力的温度计。</a:t>
+              <a:t>★ 核心要点：安全边际率度量了企业在不发生亏损的前提下所能承受的最大销售下滑幅度，是企业抗风险能力的温度计。</a:t>
             </a:r>
           </a:p>
         </p:txBody>
@@ -8758,7 +8758,7 @@
                 <a:latin typeface="Times New Roman"/>
                 <a:ea typeface="宋体"/>
               </a:rPr>
-              <a:t>  1. 经营杠杆率（Degree of Operating Leverage）严格推导</a:t>
+              <a:t>1. 经营杠杆率（Degree of Operating Leverage）严格推导</a:t>
             </a:r>
           </a:p>
         </p:txBody>
@@ -8801,7 +8801,7 @@
                 <a:latin typeface="Times New Roman"/>
                 <a:ea typeface="宋体"/>
               </a:rPr>
-              <a:t>（1）DOL 经济定义： </a:t>
+              <a:t>（1）DOL 经济定义：</a:t>
             </a:r>
             <a:r>
               <a:rPr sz="1250" b="0">
@@ -8831,7 +8831,7 @@
                 <a:latin typeface="Times New Roman"/>
                 <a:ea typeface="宋体"/>
               </a:rPr>
-              <a:t>（2）微分代数展开： </a:t>
+              <a:t>（2）微分代数展开：</a:t>
             </a:r>
             <a:r>
               <a:rPr sz="1250" b="0">
@@ -8841,7 +8841,7 @@
                 <a:latin typeface="Times New Roman"/>
                 <a:ea typeface="宋体"/>
               </a:rPr>
-              <a:t>DOL = \frac{\Delta \pi / \pi}{\Delta Q / Q} = \frac{d\pi}{dQ} \cdot \frac{Q}{\pi} = (P - V) \cdot \frac{Q}{(P - V)Q - F}</a:t>
+              <a:t>DOL = (Δ π / π) / (Δ Q / Q) = (dπ) / dQ · (Q) / (π) = (P - V) · (Q) / ((P - V)Q - F)</a:t>
             </a:r>
           </a:p>
           <a:p>
@@ -8861,7 +8861,7 @@
                 <a:latin typeface="Times New Roman"/>
                 <a:ea typeface="宋体"/>
               </a:rPr>
-              <a:t>（3）DOL 黄金计算公式： </a:t>
+              <a:t>（3）DOL 黄金计算公式：</a:t>
             </a:r>
             <a:r>
               <a:rPr sz="1250" b="0">
@@ -8871,7 +8871,7 @@
                 <a:latin typeface="Times New Roman"/>
                 <a:ea typeface="宋体"/>
               </a:rPr>
-              <a:t>DOL = \frac{TCM}{\pi} = \frac{(P - V)Q}{(P - V)Q - F} = \frac{\text{基期总边际贡献}}{\text{基期息税前利润}}</a:t>
+              <a:t>DOL = (TCM) / (π) = ((P - V)Q) / ((P - V)Q - F) = (基期总边际贡献) / (基期息税前利润)</a:t>
             </a:r>
           </a:p>
           <a:p>
@@ -8891,7 +8891,7 @@
                 <a:latin typeface="Times New Roman"/>
                 <a:ea typeface="宋体"/>
               </a:rPr>
-              <a:t>（4）安全边际率倒数定理： </a:t>
+              <a:t>（4）安全边际率倒数定理：</a:t>
             </a:r>
             <a:r>
               <a:rPr sz="1250" b="0">
@@ -8901,7 +8901,7 @@
                 <a:latin typeface="Times New Roman"/>
                 <a:ea typeface="宋体"/>
               </a:rPr>
-              <a:t>DOL = \frac{1}{MSR} \quad (经营杠杆率恒等于安全边际率的倒数！)</a:t>
+              <a:t>DOL = 1 / MSR (经营杠杆率恒等于安全边际率的倒数！)</a:t>
             </a:r>
           </a:p>
         </p:txBody>
@@ -9001,7 +9001,7 @@
                 <a:latin typeface="Times New Roman"/>
                 <a:ea typeface="宋体"/>
               </a:rPr>
-              <a:t>  2. 固定成本的杠杆放大倍数机理</a:t>
+              <a:t>2. 固定成本的杠杆放大倍数机理</a:t>
             </a:r>
           </a:p>
         </p:txBody>
@@ -9044,7 +9044,7 @@
                 <a:latin typeface="Times New Roman"/>
                 <a:ea typeface="宋体"/>
               </a:rPr>
-              <a:t>（1）无固定成本 (F=0)： </a:t>
+              <a:t>（1）无固定成本 (F=0)：</a:t>
             </a:r>
             <a:r>
               <a:rPr sz="1250" b="0">
@@ -9074,7 +9074,7 @@
                 <a:latin typeface="Times New Roman"/>
                 <a:ea typeface="宋体"/>
               </a:rPr>
-              <a:t>（2）存在固定成本 (F&gt;0)： </a:t>
+              <a:t>（2）存在固定成本 (F&gt;0)：</a:t>
             </a:r>
             <a:r>
               <a:rPr sz="1250" b="0">
@@ -9141,7 +9141,7 @@
                 <a:latin typeface="Times New Roman"/>
                 <a:ea typeface="宋体"/>
               </a:rPr>
-              <a:t>  ★ 核心要点：经营杠杆是固定资产与研发重投入在带来高利润弹性的同时引入经营风险的双刃剑。</a:t>
+              <a:t>★ 核心要点：经营杠杆是固定资产与研发重投入在带来高利润弹性的同时引入经营风险的双刃剑。</a:t>
             </a:r>
           </a:p>
         </p:txBody>
@@ -9548,7 +9548,7 @@
                 <a:latin typeface="Times New Roman"/>
                 <a:ea typeface="宋体"/>
               </a:rPr>
-              <a:t>  1. 重资产模式（高固定成本 F，低单位变动成本 V）</a:t>
+              <a:t>1. 重资产模式（高固定成本 F，低单位变动成本 V）</a:t>
             </a:r>
           </a:p>
         </p:txBody>
@@ -9591,7 +9591,7 @@
                 <a:latin typeface="Times New Roman"/>
                 <a:ea typeface="宋体"/>
               </a:rPr>
-              <a:t>（1）财务特征： </a:t>
+              <a:t>（1）财务特征：</a:t>
             </a:r>
             <a:r>
               <a:rPr sz="1250" b="0">
@@ -9601,7 +9601,7 @@
                 <a:latin typeface="Times New Roman"/>
                 <a:ea typeface="宋体"/>
               </a:rPr>
-              <a:t>盈亏平衡点 Q_0 极高，但边际贡献率 CMR 极高，DOL 极大。</a:t>
+              <a:t>盈亏平衡点 Q₀ 极高，但边际贡献率 CMR 极高，DOL 极大。</a:t>
             </a:r>
           </a:p>
           <a:p>
@@ -9621,7 +9621,7 @@
                 <a:latin typeface="Times New Roman"/>
                 <a:ea typeface="宋体"/>
               </a:rPr>
-              <a:t>（2）繁荣期： </a:t>
+              <a:t>（2）繁荣期：</a:t>
             </a:r>
             <a:r>
               <a:rPr sz="1250" b="0">
@@ -9651,7 +9651,7 @@
                 <a:latin typeface="Times New Roman"/>
                 <a:ea typeface="宋体"/>
               </a:rPr>
-              <a:t>（3）萧条期： </a:t>
+              <a:t>（3）萧条期：</a:t>
             </a:r>
             <a:r>
               <a:rPr sz="1250" b="0">
@@ -9761,7 +9761,7 @@
                 <a:latin typeface="Times New Roman"/>
                 <a:ea typeface="宋体"/>
               </a:rPr>
-              <a:t>  2. 轻资产模式（低固定成本 F，高单位变动成本 V）</a:t>
+              <a:t>2. 轻资产模式（低固定成本 F，高单位变动成本 V）</a:t>
             </a:r>
           </a:p>
         </p:txBody>
@@ -9804,7 +9804,7 @@
                 <a:latin typeface="Times New Roman"/>
                 <a:ea typeface="宋体"/>
               </a:rPr>
-              <a:t>（1）财务特征： </a:t>
+              <a:t>（1）财务特征：</a:t>
             </a:r>
             <a:r>
               <a:rPr sz="1250" b="0">
@@ -9814,7 +9814,7 @@
                 <a:latin typeface="Times New Roman"/>
                 <a:ea typeface="宋体"/>
               </a:rPr>
-              <a:t>生产外包、设备租赁，F 极低，保本点 Q_0 极低，DOL 接近 1。</a:t>
+              <a:t>生产外包、设备租赁，F 极低，保本点 Q₀ 极低，DOL 接近 1。</a:t>
             </a:r>
           </a:p>
           <a:p>
@@ -9834,7 +9834,7 @@
                 <a:latin typeface="Times New Roman"/>
                 <a:ea typeface="宋体"/>
               </a:rPr>
-              <a:t>（2）稳健抗周期： </a:t>
+              <a:t>（2）稳健抗周期：</a:t>
             </a:r>
             <a:r>
               <a:rPr sz="1250" b="0">
@@ -9864,7 +9864,7 @@
                 <a:latin typeface="Times New Roman"/>
                 <a:ea typeface="宋体"/>
               </a:rPr>
-              <a:t>（3）商业权衡： </a:t>
+              <a:t>（3）商业权衡：</a:t>
             </a:r>
             <a:r>
               <a:rPr sz="1250" b="0">
@@ -9931,7 +9931,7 @@
                 <a:latin typeface="Times New Roman"/>
                 <a:ea typeface="宋体"/>
               </a:rPr>
-              <a:t>  ★ 核心要点：商业模式设计的核心在于根据自身风险偏好与行业生命周期，在重资产高杠杆与轻资产高韧性之间取得最优平衡。</a:t>
+              <a:t>★ 核心要点：商业模式设计的核心在于根据自身风险偏好与行业生命周期，在重资产高杠杆与轻资产高韧性之间取得最优平衡。</a:t>
             </a:r>
           </a:p>
         </p:txBody>
@@ -11933,7 +11933,7 @@
                 <a:latin typeface="Times New Roman"/>
                 <a:ea typeface="宋体"/>
               </a:rPr>
-              <a:t>  1. 限制性资源（瓶颈 Constraint）决策法则</a:t>
+              <a:t>1. 限制性资源（瓶颈 Constraint）决策法则</a:t>
             </a:r>
           </a:p>
         </p:txBody>
@@ -11976,7 +11976,7 @@
                 <a:latin typeface="Times New Roman"/>
                 <a:ea typeface="宋体"/>
               </a:rPr>
-              <a:t>（1）多产品决策陷阱： </a:t>
+              <a:t>（1）多产品决策陷阱：</a:t>
             </a:r>
             <a:r>
               <a:rPr sz="1250" b="0">
@@ -12006,7 +12006,7 @@
                 <a:latin typeface="Times New Roman"/>
                 <a:ea typeface="宋体"/>
               </a:rPr>
-              <a:t>（2）黄金优选指标： </a:t>
+              <a:t>（2）黄金优选指标：</a:t>
             </a:r>
             <a:r>
               <a:rPr sz="1250" b="0">
@@ -12016,7 +12016,7 @@
                 <a:latin typeface="Times New Roman"/>
                 <a:ea typeface="宋体"/>
               </a:rPr>
-              <a:t>\text{单位限制资源边际贡献} = \frac{\text{单件产品边际贡献 } (P - V)}{\text{单件产品消耗的限制资源量 } t}。</a:t>
+              <a:t>单位限制资源边际贡献 = (单件产品边际贡献 (P - V)) / (单件产品消耗的限制资源量 t)。</a:t>
             </a:r>
           </a:p>
           <a:p>
@@ -12036,7 +12036,7 @@
                 <a:latin typeface="Times New Roman"/>
                 <a:ea typeface="宋体"/>
               </a:rPr>
-              <a:t>（3）决策准则： </a:t>
+              <a:t>（3）决策准则：</a:t>
             </a:r>
             <a:r>
               <a:rPr sz="1250" b="0">
@@ -12146,7 +12146,7 @@
                 <a:latin typeface="Times New Roman"/>
                 <a:ea typeface="宋体"/>
               </a:rPr>
-              <a:t>  2. 例5-9：甲乙多产品机床工时分配算例</a:t>
+              <a:t>2. 例5-9：甲乙多产品机床工时分配算例</a:t>
             </a:r>
           </a:p>
         </p:txBody>
@@ -12189,7 +12189,7 @@
                 <a:latin typeface="Times New Roman"/>
                 <a:ea typeface="宋体"/>
               </a:rPr>
-              <a:t>（1）甲产品： </a:t>
+              <a:t>（1）甲产品：</a:t>
             </a:r>
             <a:r>
               <a:rPr sz="1250" b="0">
@@ -12199,7 +12199,7 @@
                 <a:latin typeface="Times New Roman"/>
                 <a:ea typeface="宋体"/>
               </a:rPr>
-              <a:t>单件售价 100 元，变动成本 60 元（单件贡献 40 元），消耗机床 2 小时 \implies 单位工时边际贡献 = 40/2 = 20 元/小时。</a:t>
+              <a:t>单件售价 100 元，变动成本 60 元（单件贡献 40 元），消耗机床 2 小时 ⇒ 单位工时边际贡献 = 40/2 = 20 元/小时。</a:t>
             </a:r>
           </a:p>
           <a:p>
@@ -12219,7 +12219,7 @@
                 <a:latin typeface="Times New Roman"/>
                 <a:ea typeface="宋体"/>
               </a:rPr>
-              <a:t>（2）乙产品： </a:t>
+              <a:t>（2）乙产品：</a:t>
             </a:r>
             <a:r>
               <a:rPr sz="1250" b="0">
@@ -12229,7 +12229,7 @@
                 <a:latin typeface="Times New Roman"/>
                 <a:ea typeface="宋体"/>
               </a:rPr>
-              <a:t>单件售价 80 元，变动成本 50 元（单件贡献 30 元），消耗机床 1 小时 \implies 单位工时边际贡献 = 30/1 = 30 元/小时！</a:t>
+              <a:t>单件售价 80 元，变动成本 50 元（单件贡献 30 元），消耗机床 1 小时 ⇒ 单位工时边际贡献 = 30/1 = 30 元/小时！</a:t>
             </a:r>
           </a:p>
           <a:p>
@@ -12249,7 +12249,7 @@
                 <a:latin typeface="Times New Roman"/>
                 <a:ea typeface="宋体"/>
               </a:rPr>
-              <a:t>（3）排产决策： </a:t>
+              <a:t>（3）排产决策：</a:t>
             </a:r>
             <a:r>
               <a:rPr sz="1250" b="0">
@@ -12259,7 +12259,7 @@
                 <a:latin typeface="Times New Roman"/>
                 <a:ea typeface="宋体"/>
               </a:rPr>
-              <a:t>乙产品单件利润虽低，但周转极快，单位工时产出 30元 &gt; 甲产品 20元 \implies 必须 100% 优先排产乙产品！</a:t>
+              <a:t>乙产品单件利润虽低，但周转极快，单位工时产出 30元 &gt; 甲产品 20元 ⇒ 必须 100% 优先排产乙产品！</a:t>
             </a:r>
           </a:p>
         </p:txBody>
@@ -12316,7 +12316,7 @@
                 <a:latin typeface="Times New Roman"/>
                 <a:ea typeface="宋体"/>
               </a:rPr>
-              <a:t>  ★ 核心要点：限制资源优化分配是精益生产与约束理论（TOC）的核心算法，实现企业瓶颈产出最大化。</a:t>
+              <a:t>★ 核心要点：限制资源优化分配是精益生产与约束理论（TOC）的核心算法，实现企业瓶颈产出最大化。</a:t>
             </a:r>
           </a:p>
         </p:txBody>
@@ -12723,7 +12723,7 @@
                 <a:latin typeface="Times New Roman"/>
                 <a:ea typeface="宋体"/>
               </a:rPr>
-              <a:t>  八大决策成本体系</a:t>
+              <a:t>八大决策成本体系</a:t>
             </a:r>
           </a:p>
         </p:txBody>
@@ -12927,7 +12927,7 @@
                 <a:latin typeface="Times New Roman"/>
                 <a:ea typeface="宋体"/>
               </a:rPr>
-              <a:t>  成本函数与包络曲线</a:t>
+              <a:t>成本函数与包络曲线</a:t>
             </a:r>
           </a:p>
         </p:txBody>
@@ -13131,7 +13131,7 @@
                 <a:latin typeface="Times New Roman"/>
                 <a:ea typeface="宋体"/>
               </a:rPr>
-              <a:t>  范围经济与精益生产</a:t>
+              <a:t>范围经济与精益生产</a:t>
             </a:r>
           </a:p>
         </p:txBody>
@@ -13335,7 +13335,7 @@
                 <a:latin typeface="Times New Roman"/>
                 <a:ea typeface="宋体"/>
               </a:rPr>
-              <a:t>  贡献分析与经营杠杆</a:t>
+              <a:t>贡献分析与经营杠杆</a:t>
             </a:r>
           </a:p>
         </p:txBody>
@@ -13496,7 +13496,7 @@
                 <a:latin typeface="Times New Roman"/>
                 <a:ea typeface="宋体"/>
               </a:rPr>
-              <a:t>  ★ 战略结语：成本不仅是会计账目上的扣除项，更是企业战略资源的配置效率刻度。掌握经济成本与杠杆规律，方能打赢现代产业成本战。</a:t>
+              <a:t>★ 战略结语：成本不仅是会计账目上的扣除项，更是企业战略资源的配置效率刻度。掌握经济成本与杠杆规律，方能打赢现代产业成本战。</a:t>
             </a:r>
           </a:p>
         </p:txBody>
@@ -13903,7 +13903,7 @@
                 <a:latin typeface="Times New Roman"/>
                 <a:ea typeface="宋体"/>
               </a:rPr>
-              <a:t>  课后复习思考题与 MBA 讨论案例（严格对应课本习题）</a:t>
+              <a:t>课后复习思考题与 MBA 讨论案例（严格对应课本习题）</a:t>
             </a:r>
           </a:p>
         </p:txBody>
@@ -13946,7 +13946,7 @@
                 <a:latin typeface="Times New Roman"/>
                 <a:ea typeface="宋体"/>
               </a:rPr>
-              <a:t>1. </a:t>
+              <a:t>1.</a:t>
             </a:r>
             <a:r>
               <a:rPr sz="1150" b="0">
@@ -13976,7 +13976,7 @@
                 <a:latin typeface="Times New Roman"/>
                 <a:ea typeface="宋体"/>
               </a:rPr>
-              <a:t>2. </a:t>
+              <a:t>2.</a:t>
             </a:r>
             <a:r>
               <a:rPr sz="1150" b="0">
@@ -14006,7 +14006,7 @@
                 <a:latin typeface="Times New Roman"/>
                 <a:ea typeface="宋体"/>
               </a:rPr>
-              <a:t>3. </a:t>
+              <a:t>3.</a:t>
             </a:r>
             <a:r>
               <a:rPr sz="1150" b="0">
@@ -14036,7 +14036,7 @@
                 <a:latin typeface="Times New Roman"/>
                 <a:ea typeface="宋体"/>
               </a:rPr>
-              <a:t>4. </a:t>
+              <a:t>4.</a:t>
             </a:r>
             <a:r>
               <a:rPr sz="1150" b="0">
@@ -14066,7 +14066,7 @@
                 <a:latin typeface="Times New Roman"/>
                 <a:ea typeface="宋体"/>
               </a:rPr>
-              <a:t>5. </a:t>
+              <a:t>5.</a:t>
             </a:r>
             <a:r>
               <a:rPr sz="1150" b="0">
@@ -14096,7 +14096,7 @@
                 <a:latin typeface="Times New Roman"/>
                 <a:ea typeface="宋体"/>
               </a:rPr>
-              <a:t>6. </a:t>
+              <a:t>6.</a:t>
             </a:r>
             <a:r>
               <a:rPr sz="1150" b="0">
@@ -14126,7 +14126,7 @@
                 <a:latin typeface="Times New Roman"/>
                 <a:ea typeface="宋体"/>
               </a:rPr>
-              <a:t>7. </a:t>
+              <a:t>7.</a:t>
             </a:r>
             <a:r>
               <a:rPr sz="1150" b="0">
@@ -14850,7 +14850,7 @@
                 <a:latin typeface="Times New Roman"/>
                 <a:ea typeface="宋体"/>
               </a:rPr>
-              <a:t>  1. 机会成本（Opportunity Cost）vs 会计成本（Accounting Cost）</a:t>
+              <a:t>1. 机会成本（Opportunity Cost）vs 会计成本（Accounting Cost）</a:t>
             </a:r>
           </a:p>
         </p:txBody>
@@ -14893,7 +14893,7 @@
                 <a:latin typeface="Times New Roman"/>
                 <a:ea typeface="宋体"/>
               </a:rPr>
-              <a:t>（1）会计成本（历史成本）： </a:t>
+              <a:t>（1）会计成本（历史成本）：</a:t>
             </a:r>
             <a:r>
               <a:rPr sz="1250" b="0">
@@ -14923,7 +14923,7 @@
                 <a:latin typeface="Times New Roman"/>
                 <a:ea typeface="宋体"/>
               </a:rPr>
-              <a:t>（2）机会成本（经济成本）： </a:t>
+              <a:t>（2）机会成本（经济成本）：</a:t>
             </a:r>
             <a:r>
               <a:rPr sz="1250" b="0">
@@ -14953,7 +14953,7 @@
                 <a:latin typeface="Times New Roman"/>
                 <a:ea typeface="宋体"/>
               </a:rPr>
-              <a:t>（3）决策准则： </a:t>
+              <a:t>（3）决策准则：</a:t>
             </a:r>
             <a:r>
               <a:rPr sz="1250" b="0">
@@ -15063,7 +15063,7 @@
                 <a:latin typeface="Times New Roman"/>
                 <a:ea typeface="宋体"/>
               </a:rPr>
-              <a:t>  2. 相关成本（Relevant Cost）vs 非相关成本（Irrelevant Cost）</a:t>
+              <a:t>2. 相关成本（Relevant Cost）vs 非相关成本（Irrelevant Cost）</a:t>
             </a:r>
           </a:p>
         </p:txBody>
@@ -15106,7 +15106,7 @@
                 <a:latin typeface="Times New Roman"/>
                 <a:ea typeface="宋体"/>
               </a:rPr>
-              <a:t>（1）相关成本： </a:t>
+              <a:t>（1）相关成本：</a:t>
             </a:r>
             <a:r>
               <a:rPr sz="1250" b="0">
@@ -15136,7 +15136,7 @@
                 <a:latin typeface="Times New Roman"/>
                 <a:ea typeface="宋体"/>
               </a:rPr>
-              <a:t>（2）非相关成本： </a:t>
+              <a:t>（2）非相关成本：</a:t>
             </a:r>
             <a:r>
               <a:rPr sz="1250" b="0">
@@ -15203,7 +15203,7 @@
                 <a:latin typeface="Times New Roman"/>
                 <a:ea typeface="宋体"/>
               </a:rPr>
-              <a:t>  ★ 核心要点：正确识别相关成本并剔除非相关成本，是管理会计与决策分析的第一准则。</a:t>
+              <a:t>★ 核心要点：正确识别相关成本并剔除非相关成本，是管理会计与决策分析的第一准则。</a:t>
             </a:r>
           </a:p>
         </p:txBody>
@@ -15610,7 +15610,7 @@
                 <a:latin typeface="Times New Roman"/>
                 <a:ea typeface="宋体"/>
               </a:rPr>
-              <a:t>  1. 增量成本（Incremental Cost）vs 沉没成本（Sunk Cost）</a:t>
+              <a:t>1. 增量成本（Incremental Cost）vs 沉没成本（Sunk Cost）</a:t>
             </a:r>
           </a:p>
         </p:txBody>
@@ -15653,7 +15653,7 @@
                 <a:latin typeface="Times New Roman"/>
                 <a:ea typeface="宋体"/>
               </a:rPr>
-              <a:t>（1）增量成本： </a:t>
+              <a:t>（1）增量成本：</a:t>
             </a:r>
             <a:r>
               <a:rPr sz="1250" b="0">
@@ -15663,7 +15663,7 @@
                 <a:latin typeface="Times New Roman"/>
                 <a:ea typeface="宋体"/>
               </a:rPr>
-              <a:t>由于采纳某项特定管理决策而引起的未来总成本的增加额（\Delta TC = TC_2 - TC_1）。</a:t>
+              <a:t>由于采纳某项特定管理决策而引起的未来总成本的增加额（Δ TC = TC₂ - TC₁）。</a:t>
             </a:r>
           </a:p>
           <a:p>
@@ -15683,7 +15683,7 @@
                 <a:latin typeface="Times New Roman"/>
                 <a:ea typeface="宋体"/>
               </a:rPr>
-              <a:t>（2）沉没成本（覆水难收）： </a:t>
+              <a:t>（2）沉没成本（覆水难收）：</a:t>
             </a:r>
             <a:r>
               <a:rPr sz="1250" b="0">
@@ -15713,7 +15713,7 @@
                 <a:latin typeface="Times New Roman"/>
                 <a:ea typeface="宋体"/>
               </a:rPr>
-              <a:t>（3）决策黄金法则： </a:t>
+              <a:t>（3）决策黄金法则：</a:t>
             </a:r>
             <a:r>
               <a:rPr sz="1250" b="0">
@@ -15823,7 +15823,7 @@
                 <a:latin typeface="Times New Roman"/>
                 <a:ea typeface="宋体"/>
               </a:rPr>
-              <a:t>  2. 边际成本（Marginal Cost）vs 平均成本（Average Cost）</a:t>
+              <a:t>2. 边际成本（Marginal Cost）vs 平均成本（Average Cost）</a:t>
             </a:r>
           </a:p>
         </p:txBody>
@@ -15866,7 +15866,7 @@
                 <a:latin typeface="Times New Roman"/>
                 <a:ea typeface="宋体"/>
               </a:rPr>
-              <a:t>（1）边际成本 (MC)： </a:t>
+              <a:t>（1）边际成本 (MC)：</a:t>
             </a:r>
             <a:r>
               <a:rPr sz="1250" b="0">
@@ -15896,7 +15896,7 @@
                 <a:latin typeface="Times New Roman"/>
                 <a:ea typeface="宋体"/>
               </a:rPr>
-              <a:t>（2）平均成本 (AC)： </a:t>
+              <a:t>（2）平均成本 (AC)：</a:t>
             </a:r>
             <a:r>
               <a:rPr sz="1250" b="0">
@@ -15963,7 +15963,7 @@
                 <a:latin typeface="Times New Roman"/>
                 <a:ea typeface="宋体"/>
               </a:rPr>
-              <a:t>  ★ 核心要点：沉没成本属于过去，增量成本属于未来；边际成本指导微观产量，平均成本指示盈亏底线。</a:t>
+              <a:t>★ 核心要点：沉没成本属于过去，增量成本属于未来；边际成本指导微观产量，平均成本指示盈亏底线。</a:t>
             </a:r>
           </a:p>
         </p:txBody>
@@ -16677,7 +16677,7 @@
                 <a:latin typeface="Times New Roman"/>
                 <a:ea typeface="宋体"/>
               </a:rPr>
-              <a:t>  1. 短期边际成本与边际产量的对偶反向关系</a:t>
+              <a:t>1. 短期边际成本与边际产量的对偶反向关系</a:t>
             </a:r>
           </a:p>
         </p:txBody>
@@ -16720,7 +16720,7 @@
                 <a:latin typeface="Times New Roman"/>
                 <a:ea typeface="宋体"/>
               </a:rPr>
-              <a:t>（1）短期总变动成本公式： </a:t>
+              <a:t>（1）短期总变动成本公式：</a:t>
             </a:r>
             <a:r>
               <a:rPr sz="1250" b="0">
@@ -16730,7 +16730,7 @@
                 <a:latin typeface="Times New Roman"/>
                 <a:ea typeface="宋体"/>
               </a:rPr>
-              <a:t>TVC = w \cdot L \quad (w 为劳动工资率，L 为劳动投入量)</a:t>
+              <a:t>TVC = w · L (w 为劳动工资率，L 为劳动投入量)</a:t>
             </a:r>
           </a:p>
           <a:p>
@@ -16750,7 +16750,7 @@
                 <a:latin typeface="Times New Roman"/>
                 <a:ea typeface="宋体"/>
               </a:rPr>
-              <a:t>（2）边际成本微分展开： </a:t>
+              <a:t>（2）边际成本微分展开：</a:t>
             </a:r>
             <a:r>
               <a:rPr sz="1250" b="0">
@@ -16760,7 +16760,7 @@
                 <a:latin typeface="Times New Roman"/>
                 <a:ea typeface="宋体"/>
               </a:rPr>
-              <a:t>MC = \frac{dTVC}{dQ} = w \cdot \frac{dL}{dQ} = w \cdot \frac{1}{dQ/dL} = \frac{w}{MP_L}</a:t>
+              <a:t>MC = dTVC / dQ = w · dL / dQ = w · 1 / (dQ/dL) = w / MP_L</a:t>
             </a:r>
           </a:p>
           <a:p>
@@ -16780,7 +16780,7 @@
                 <a:latin typeface="Times New Roman"/>
                 <a:ea typeface="宋体"/>
               </a:rPr>
-              <a:t>（3）对偶反向定理： </a:t>
+              <a:t>（3）对偶反向定理：</a:t>
             </a:r>
             <a:r>
               <a:rPr sz="1250" b="0">
@@ -16790,7 +16790,7 @@
                 <a:latin typeface="Times New Roman"/>
                 <a:ea typeface="宋体"/>
               </a:rPr>
-              <a:t>当边际产量 MP_L 达到最高顶点时，边际成本 MC 恰好达到最低谷底！MP_L 上升 \iff MC 下降；MP_L 递减 \iff MC 递增！</a:t>
+              <a:t>当边际产量 MP_L 达到最高顶点时，边际成本 MC 恰好达到最低谷底！MP_L 上升 ⇔ MC 下降；MP_L 递减 ⇔ MC 递增！</a:t>
             </a:r>
           </a:p>
         </p:txBody>
@@ -16890,7 +16890,7 @@
                 <a:latin typeface="Times New Roman"/>
                 <a:ea typeface="宋体"/>
               </a:rPr>
-              <a:t>  2. 短期平均变动成本与平均产量的对偶反向关系</a:t>
+              <a:t>2. 短期平均变动成本与平均产量的对偶反向关系</a:t>
             </a:r>
           </a:p>
         </p:txBody>
@@ -16933,7 +16933,7 @@
                 <a:latin typeface="Times New Roman"/>
                 <a:ea typeface="宋体"/>
               </a:rPr>
-              <a:t>（1）平均变动成本展开： </a:t>
+              <a:t>（1）平均变动成本展开：</a:t>
             </a:r>
             <a:r>
               <a:rPr sz="1250" b="0">
@@ -16943,7 +16943,7 @@
                 <a:latin typeface="Times New Roman"/>
                 <a:ea typeface="宋体"/>
               </a:rPr>
-              <a:t>AVC = \frac{TVC}{Q} = \frac{w \cdot L}{Q} = \frac{w}{Q/L} = \frac{w}{AP_L}</a:t>
+              <a:t>AVC = TVC / Q = (w · L) / Q = (w) / (Q/L) = w / AP_L</a:t>
             </a:r>
           </a:p>
           <a:p>
@@ -16963,7 +16963,7 @@
                 <a:latin typeface="Times New Roman"/>
                 <a:ea typeface="宋体"/>
               </a:rPr>
-              <a:t>（2）对偶定理： </a:t>
+              <a:t>（2）对偶定理：</a:t>
             </a:r>
             <a:r>
               <a:rPr sz="1250" b="0">
@@ -16993,7 +16993,7 @@
                 <a:latin typeface="Times New Roman"/>
                 <a:ea typeface="宋体"/>
               </a:rPr>
-              <a:t>（3）技术决定成本： </a:t>
+              <a:t>（3）技术决定成本：</a:t>
             </a:r>
             <a:r>
               <a:rPr sz="1250" b="0">
@@ -17060,7 +17060,7 @@
                 <a:latin typeface="Times New Roman"/>
                 <a:ea typeface="宋体"/>
               </a:rPr>
-              <a:t>  ★ 核心要点：成本函数的 U 型特征是短期生产要素边际报酬递减规律在成本领域的镜像映射。</a:t>
+              <a:t>★ 核心要点：成本函数的 U 型特征是短期生产要素边际报酬递减规律在成本领域的镜像映射。</a:t>
             </a:r>
           </a:p>
         </p:txBody>
@@ -17491,7 +17491,7 @@
                 <a:latin typeface="Times New Roman"/>
                 <a:ea typeface="宋体"/>
               </a:rPr>
-              <a:t>  短期成本曲线几何关系与关键临界点</a:t>
+              <a:t>短期成本曲线几何关系与关键临界点</a:t>
             </a:r>
           </a:p>
         </p:txBody>
@@ -17534,7 +17534,7 @@
                 <a:latin typeface="Times New Roman"/>
                 <a:ea typeface="宋体"/>
               </a:rPr>
-              <a:t>（1）MC 穿过两线最低点： </a:t>
+              <a:t>（1）MC 穿过两线最低点：</a:t>
             </a:r>
             <a:r>
               <a:rPr sz="1200" b="0">
@@ -17564,7 +17564,7 @@
                 <a:latin typeface="Times New Roman"/>
                 <a:ea typeface="宋体"/>
               </a:rPr>
-              <a:t>（2）收支平衡点（P = AC_min）： </a:t>
+              <a:t>（2）收支平衡点（P = AC_min）：</a:t>
             </a:r>
             <a:r>
               <a:rPr sz="1200" b="0">
@@ -17594,7 +17594,7 @@
                 <a:latin typeface="Times New Roman"/>
                 <a:ea typeface="宋体"/>
               </a:rPr>
-              <a:t>（3）停产关门点（P = AVC_min）： </a:t>
+              <a:t>（3）停产关门点（P = AVC_min）：</a:t>
             </a:r>
             <a:r>
               <a:rPr sz="1200" b="0">
@@ -17624,7 +17624,7 @@
                 <a:latin typeface="Times New Roman"/>
                 <a:ea typeface="宋体"/>
               </a:rPr>
-              <a:t>（4）短期亏损继续生产区间（AVC_min &lt; P &lt; AC_min）： </a:t>
+              <a:t>（4）短期亏损继续生产区间（AVC_min &lt; P &lt; AC_min）：</a:t>
             </a:r>
             <a:r>
               <a:rPr sz="1200" b="0">
@@ -17691,7 +17691,7 @@
                 <a:latin typeface="Times New Roman"/>
                 <a:ea typeface="宋体"/>
               </a:rPr>
-              <a:t>  ★ 理论精要：停产关门点法则彻底打破了'亏损就必须关门'的传统财务误区，是企业在行业严冬中自救的科学准则。</a:t>
+              <a:t>★ 理论精要：停产关门点法则彻底打破了'亏损就必须关门'的传统财务误区，是企业在行业严冬中自救的科学准则。</a:t>
             </a:r>
           </a:p>
         </p:txBody>
@@ -18098,7 +18098,7 @@
                 <a:latin typeface="Times New Roman"/>
                 <a:ea typeface="宋体"/>
               </a:rPr>
-              <a:t>  1. 长期平均成本（LAC）包络线构建原理</a:t>
+              <a:t>1. 长期平均成本（LAC）包络线构建原理</a:t>
             </a:r>
           </a:p>
         </p:txBody>
@@ -18141,7 +18141,7 @@
                 <a:latin typeface="Times New Roman"/>
                 <a:ea typeface="宋体"/>
               </a:rPr>
-              <a:t>（1）长期所有要素可变： </a:t>
+              <a:t>（1）长期所有要素可变：</a:t>
             </a:r>
             <a:r>
               <a:rPr sz="1250" b="0">
@@ -18171,7 +18171,7 @@
                 <a:latin typeface="Times New Roman"/>
                 <a:ea typeface="宋体"/>
               </a:rPr>
-              <a:t>（2）包络线定义： </a:t>
+              <a:t>（2）包络线定义：</a:t>
             </a:r>
             <a:r>
               <a:rPr sz="1250" b="0">
@@ -18201,7 +18201,7 @@
                 <a:latin typeface="Times New Roman"/>
                 <a:ea typeface="宋体"/>
               </a:rPr>
-              <a:t>（3）切点性质： </a:t>
+              <a:t>（3）切点性质：</a:t>
             </a:r>
             <a:r>
               <a:rPr sz="1250" b="0">
@@ -18311,7 +18311,7 @@
                 <a:latin typeface="Times New Roman"/>
                 <a:ea typeface="宋体"/>
               </a:rPr>
-              <a:t>  2. 长期 LAC 曲线呈 U 型的深层成因</a:t>
+              <a:t>2. 长期 LAC 曲线呈 U 型的深层成因</a:t>
             </a:r>
           </a:p>
         </p:txBody>
@@ -18354,7 +18354,7 @@
                 <a:latin typeface="Times New Roman"/>
                 <a:ea typeface="宋体"/>
               </a:rPr>
-              <a:t>（1）下降阶段（规模经济）： </a:t>
+              <a:t>（1）下降阶段（规模经济）：</a:t>
             </a:r>
             <a:r>
               <a:rPr sz="1250" b="0">
@@ -18384,7 +18384,7 @@
                 <a:latin typeface="Times New Roman"/>
                 <a:ea typeface="宋体"/>
               </a:rPr>
-              <a:t>（2）底部平坦段（规模报酬不变）： </a:t>
+              <a:t>（2）底部平坦段（规模报酬不变）：</a:t>
             </a:r>
             <a:r>
               <a:rPr sz="1250" b="0">
@@ -18414,7 +18414,7 @@
                 <a:latin typeface="Times New Roman"/>
                 <a:ea typeface="宋体"/>
               </a:rPr>
-              <a:t>（3）上升阶段（规模不经济）： </a:t>
+              <a:t>（3）上升阶段（规模不经济）：</a:t>
             </a:r>
             <a:r>
               <a:rPr sz="1250" b="0">
@@ -18481,7 +18481,7 @@
                 <a:latin typeface="Times New Roman"/>
                 <a:ea typeface="宋体"/>
               </a:rPr>
-              <a:t>  ★ 核心要点：长期 LAC 曲线描绘了企业在不同扩张阶段的理论最低生产成本轨迹，是长期产能规划的基石。</a:t>
+              <a:t>★ 核心要点：长期 LAC 曲线描绘了企业在不同扩张阶段的理论最低生产成本轨迹，是长期产能规划的基石。</a:t>
             </a:r>
           </a:p>
         </p:txBody>
